--- a/livro_ia_educacao/saida/pptx/Cap06_slides.pptx
+++ b/livro_ia_educacao/saida/pptx/Cap06_slides.pptx
@@ -8808,11 +8808,11 @@
         <p:spPr>
           <a:xfrm>
             <a:off x="548640" y="1417320"/>
-            <a:ext cx="11064240" cy="762000"/>
+            <a:ext cx="11064240" cy="682752"/>
           </a:xfrm>
           <a:prstGeom prst="roundRect">
             <a:avLst>
-              <a:gd name="adj" fmla="val 14400"/>
+              <a:gd name="adj" fmla="val 16071"/>
             </a:avLst>
           </a:prstGeom>
           <a:solidFill>
@@ -8839,7 +8839,7 @@
         <p:spPr>
           <a:xfrm>
             <a:off x="731520" y="1417320"/>
-            <a:ext cx="548640" cy="762000"/>
+            <a:ext cx="548640" cy="682752"/>
           </a:xfrm>
           <a:prstGeom prst="rect">
             <a:avLst/>
@@ -8875,7 +8875,7 @@
         <p:spPr>
           <a:xfrm>
             <a:off x="1463040" y="1417320"/>
-            <a:ext cx="9966960" cy="762000"/>
+            <a:ext cx="9966960" cy="682752"/>
           </a:xfrm>
           <a:prstGeom prst="rect">
             <a:avLst/>
@@ -8910,12 +8910,12 @@
         </p:nvSpPr>
         <p:spPr>
           <a:xfrm>
-            <a:off x="548640" y="2289048"/>
-            <a:ext cx="11064240" cy="762000"/>
+            <a:off x="548640" y="2209800"/>
+            <a:ext cx="11064240" cy="682752"/>
           </a:xfrm>
           <a:prstGeom prst="roundRect">
             <a:avLst>
-              <a:gd name="adj" fmla="val 14400"/>
+              <a:gd name="adj" fmla="val 16071"/>
             </a:avLst>
           </a:prstGeom>
           <a:solidFill>
@@ -8941,8 +8941,8 @@
         </p:nvSpPr>
         <p:spPr>
           <a:xfrm>
-            <a:off x="731520" y="2289048"/>
-            <a:ext cx="548640" cy="762000"/>
+            <a:off x="731520" y="2209800"/>
+            <a:ext cx="548640" cy="682752"/>
           </a:xfrm>
           <a:prstGeom prst="rect">
             <a:avLst/>
@@ -8977,8 +8977,8 @@
         </p:nvSpPr>
         <p:spPr>
           <a:xfrm>
-            <a:off x="1463040" y="2289048"/>
-            <a:ext cx="9966960" cy="762000"/>
+            <a:off x="1463040" y="2209800"/>
+            <a:ext cx="9966960" cy="682752"/>
           </a:xfrm>
           <a:prstGeom prst="rect">
             <a:avLst/>
@@ -9013,12 +9013,12 @@
         </p:nvSpPr>
         <p:spPr>
           <a:xfrm>
-            <a:off x="548640" y="3160776"/>
-            <a:ext cx="11064240" cy="762000"/>
+            <a:off x="548640" y="3002280"/>
+            <a:ext cx="11064240" cy="682752"/>
           </a:xfrm>
           <a:prstGeom prst="roundRect">
             <a:avLst>
-              <a:gd name="adj" fmla="val 14400"/>
+              <a:gd name="adj" fmla="val 16071"/>
             </a:avLst>
           </a:prstGeom>
           <a:solidFill>
@@ -9044,8 +9044,8 @@
         </p:nvSpPr>
         <p:spPr>
           <a:xfrm>
-            <a:off x="731520" y="3160776"/>
-            <a:ext cx="548640" cy="762000"/>
+            <a:off x="731520" y="3002280"/>
+            <a:ext cx="548640" cy="682752"/>
           </a:xfrm>
           <a:prstGeom prst="rect">
             <a:avLst/>
@@ -9080,8 +9080,8 @@
         </p:nvSpPr>
         <p:spPr>
           <a:xfrm>
-            <a:off x="1463040" y="3160776"/>
-            <a:ext cx="9966960" cy="762000"/>
+            <a:off x="1463040" y="3002280"/>
+            <a:ext cx="9966960" cy="682752"/>
           </a:xfrm>
           <a:prstGeom prst="rect">
             <a:avLst/>
@@ -9116,12 +9116,12 @@
         </p:nvSpPr>
         <p:spPr>
           <a:xfrm>
-            <a:off x="548640" y="4032504"/>
-            <a:ext cx="11064240" cy="762000"/>
+            <a:off x="548640" y="3794760"/>
+            <a:ext cx="11064240" cy="682752"/>
           </a:xfrm>
           <a:prstGeom prst="roundRect">
             <a:avLst>
-              <a:gd name="adj" fmla="val 14400"/>
+              <a:gd name="adj" fmla="val 16071"/>
             </a:avLst>
           </a:prstGeom>
           <a:solidFill>
@@ -9147,8 +9147,8 @@
         </p:nvSpPr>
         <p:spPr>
           <a:xfrm>
-            <a:off x="731520" y="4032504"/>
-            <a:ext cx="548640" cy="762000"/>
+            <a:off x="731520" y="3794760"/>
+            <a:ext cx="548640" cy="682752"/>
           </a:xfrm>
           <a:prstGeom prst="rect">
             <a:avLst/>
@@ -9183,8 +9183,8 @@
         </p:nvSpPr>
         <p:spPr>
           <a:xfrm>
-            <a:off x="1463040" y="4032504"/>
-            <a:ext cx="9966960" cy="762000"/>
+            <a:off x="1463040" y="3794760"/>
+            <a:ext cx="9966960" cy="682752"/>
           </a:xfrm>
           <a:prstGeom prst="rect">
             <a:avLst/>
@@ -9219,12 +9219,12 @@
         </p:nvSpPr>
         <p:spPr>
           <a:xfrm>
-            <a:off x="548640" y="4904232"/>
-            <a:ext cx="11064240" cy="762000"/>
+            <a:off x="548640" y="4587240"/>
+            <a:ext cx="11064240" cy="682752"/>
           </a:xfrm>
           <a:prstGeom prst="roundRect">
             <a:avLst>
-              <a:gd name="adj" fmla="val 14400"/>
+              <a:gd name="adj" fmla="val 16071"/>
             </a:avLst>
           </a:prstGeom>
           <a:solidFill>
@@ -9250,8 +9250,8 @@
         </p:nvSpPr>
         <p:spPr>
           <a:xfrm>
-            <a:off x="731520" y="4904232"/>
-            <a:ext cx="548640" cy="762000"/>
+            <a:off x="731520" y="4587240"/>
+            <a:ext cx="548640" cy="682752"/>
           </a:xfrm>
           <a:prstGeom prst="rect">
             <a:avLst/>
@@ -9286,8 +9286,8 @@
         </p:nvSpPr>
         <p:spPr>
           <a:xfrm>
-            <a:off x="1463040" y="4904232"/>
-            <a:ext cx="9966960" cy="762000"/>
+            <a:off x="1463040" y="4587240"/>
+            <a:ext cx="9966960" cy="682752"/>
           </a:xfrm>
           <a:prstGeom prst="rect">
             <a:avLst/>
@@ -9322,12 +9322,12 @@
         </p:nvSpPr>
         <p:spPr>
           <a:xfrm>
-            <a:off x="548640" y="5775960"/>
-            <a:ext cx="11064240" cy="762000"/>
+            <a:off x="548640" y="5379720"/>
+            <a:ext cx="11064240" cy="682752"/>
           </a:xfrm>
           <a:prstGeom prst="roundRect">
             <a:avLst>
-              <a:gd name="adj" fmla="val 14400"/>
+              <a:gd name="adj" fmla="val 16071"/>
             </a:avLst>
           </a:prstGeom>
           <a:solidFill>
@@ -9353,8 +9353,8 @@
         </p:nvSpPr>
         <p:spPr>
           <a:xfrm>
-            <a:off x="731520" y="5775960"/>
-            <a:ext cx="548640" cy="762000"/>
+            <a:off x="731520" y="5379720"/>
+            <a:ext cx="548640" cy="682752"/>
           </a:xfrm>
           <a:prstGeom prst="rect">
             <a:avLst/>
@@ -9389,8 +9389,8 @@
         </p:nvSpPr>
         <p:spPr>
           <a:xfrm>
-            <a:off x="1463040" y="5775960"/>
-            <a:ext cx="9966960" cy="762000"/>
+            <a:off x="1463040" y="5379720"/>
+            <a:ext cx="9966960" cy="682752"/>
           </a:xfrm>
           <a:prstGeom prst="rect">
             <a:avLst/>
